--- a/classes/parte-17-profundizacion-para-certificaciones/315-mfa-y-gestion-de-accesos-privilegiados-pam/clase-315-presentacion.pptx
+++ b/classes/parte-17-profundizacion-para-certificaciones/315-mfa-y-gestion-de-accesos-privilegiados-pam/clase-315-presentacion.pptx
@@ -17,6 +17,10 @@
     <p:sldId id="265" r:id="rId16"/>
     <p:sldId id="266" r:id="rId17"/>
     <p:sldId id="267" r:id="rId18"/>
+    <p:sldId id="268" r:id="rId19"/>
+    <p:sldId id="269" r:id="rId20"/>
+    <p:sldId id="270" r:id="rId21"/>
+    <p:sldId id="271" r:id="rId22"/>
   </p:sldIdLst>
   <p:sldSz cx="9144000" cy="6858000" type="screen4x3"/>
   <p:notesSz cx="6858000" cy="9144000"/>
@@ -3198,7 +3202,7 @@
                   <a:srgbClr val="0B3D2E"/>
                 </a:solidFill>
               </a:rPr>
-              <a:t>⚠️ Errores comunes</a:t>
+              <a:t>🧪 Laboratorio guiado — Política MFA y flujo de acceso privilegiado</a:t>
             </a:r>
           </a:p>
         </p:txBody>
@@ -3236,82 +3240,97 @@
                   <a:srgbClr val="22282E"/>
                 </a:solidFill>
               </a:rPr>
-              <a:t>•  MFA por SMS considerado "seguro" — SMS es susceptible a SIM swapping e intercepción (NIST lo desaconseja). Migra a TOTP o FIDO2.</a:t>
-            </a:r>
-          </a:p>
-          <a:p>
-            <a:pPr>
-              <a:spcAft>
-                <a:spcPts val="600"/>
-              </a:spcAft>
-            </a:pPr>
-            <a:r>
-              <a:rPr sz="1500">
-                <a:solidFill>
-                  <a:srgbClr val="22282E"/>
-                </a:solidFill>
-              </a:rPr>
-              <a:t>•  Usuarios aprueban push sin mirar (MFA fatigue) — Bombardeo de notificaciones. Usa number matching o pasa a FIDO2/passkeys.</a:t>
-            </a:r>
-          </a:p>
-          <a:p>
-            <a:pPr>
-              <a:spcAft>
-                <a:spcPts val="600"/>
-              </a:spcAft>
-            </a:pPr>
-            <a:r>
-              <a:rPr sz="1500">
-                <a:solidFill>
-                  <a:srgbClr val="22282E"/>
-                </a:solidFill>
-              </a:rPr>
-              <a:t>•  Admins con privilegio permanente 24/7 — Ventana de exposición enorme. Aplica JIT y zero standing privilege.</a:t>
-            </a:r>
-          </a:p>
-          <a:p>
-            <a:pPr>
-              <a:spcAft>
-                <a:spcPts val="600"/>
-              </a:spcAft>
-            </a:pPr>
-            <a:r>
-              <a:rPr sz="1500">
-                <a:solidFill>
-                  <a:srgbClr val="22282E"/>
-                </a:solidFill>
-              </a:rPr>
-              <a:t>•  Contraseña de root compartida en un gestor de equipo — Sin trazabilidad ni rotación. Usa una bóveda PAM con checkout individual.</a:t>
-            </a:r>
-          </a:p>
-          <a:p>
-            <a:pPr>
-              <a:spcAft>
-                <a:spcPts val="600"/>
-              </a:spcAft>
-            </a:pPr>
-            <a:r>
-              <a:rPr sz="1500">
-                <a:solidFill>
-                  <a:srgbClr val="22282E"/>
-                </a:solidFill>
-              </a:rPr>
-              <a:t>•  Cuenta break-glass usada como acceso rutinario — Se convierte en puerta trasera. Sella, alerta en cada uso y revisa después.</a:t>
-            </a:r>
-          </a:p>
-          <a:p>
-            <a:pPr>
-              <a:spcAft>
-                <a:spcPts val="600"/>
-              </a:spcAft>
-            </a:pPr>
-            <a:r>
-              <a:rPr sz="1500">
-                <a:solidFill>
-                  <a:srgbClr val="22282E"/>
-                </a:solidFill>
-              </a:rPr>
-              <a:t>•  MFA sin cubrir el IdP ni el propio PAM — El eslabón de control queda expuesto. Protege IdP y PAM con el factor más fuerte.</a:t>
+              <a:t>•  Sobre "NovaSalud", integrando lo visto en las clases 313 y 314.</a:t>
+            </a:r>
+          </a:p>
+          <a:p>
+            <a:pPr>
+              <a:spcAft>
+                <a:spcPts val="600"/>
+              </a:spcAft>
+            </a:pPr>
+            <a:r>
+              <a:rPr sz="1500">
+                <a:solidFill>
+                  <a:srgbClr val="22282E"/>
+                </a:solidFill>
+              </a:rPr>
+              <a:t>•  Inventario de factores. Lista los métodos disponibles (contraseña, SMS-OTP, TOTP, push,</a:t>
+            </a:r>
+          </a:p>
+          <a:p>
+            <a:pPr>
+              <a:spcAft>
+                <a:spcPts val="600"/>
+              </a:spcAft>
+            </a:pPr>
+            <a:r>
+              <a:rPr sz="1500">
+                <a:solidFill>
+                  <a:srgbClr val="22282E"/>
+                </a:solidFill>
+              </a:rPr>
+              <a:t>•  FIDO2/passkey, biometría) y clasifícalos por categoría y por resistencia al phishing.</a:t>
+            </a:r>
+          </a:p>
+          <a:p>
+            <a:pPr>
+              <a:spcAft>
+                <a:spcPts val="600"/>
+              </a:spcAft>
+            </a:pPr>
+            <a:r>
+              <a:rPr sz="1500">
+                <a:solidFill>
+                  <a:srgbClr val="22282E"/>
+                </a:solidFill>
+              </a:rPr>
+              <a:t>•  Política MFA por riesgo. Define reglas: (a) acceso normal a apps internas → contraseña +</a:t>
+            </a:r>
+          </a:p>
+          <a:p>
+            <a:pPr>
+              <a:spcAft>
+                <a:spcPts val="600"/>
+              </a:spcAft>
+            </a:pPr>
+            <a:r>
+              <a:rPr sz="1500">
+                <a:solidFill>
+                  <a:srgbClr val="22282E"/>
+                </a:solidFill>
+              </a:rPr>
+              <a:t>•  TOTP/push; (b) acceso a datos Restringido o desde red no confiable → exige FIDO2/passkey;</a:t>
+            </a:r>
+          </a:p>
+          <a:p>
+            <a:pPr>
+              <a:spcAft>
+                <a:spcPts val="600"/>
+              </a:spcAft>
+            </a:pPr>
+            <a:r>
+              <a:rPr sz="1500">
+                <a:solidFill>
+                  <a:srgbClr val="22282E"/>
+                </a:solidFill>
+              </a:rPr>
+              <a:t>•  (c) administradores → siempre AAL3 (FIDO2 de hardware). Justifica cada nivel.</a:t>
+            </a:r>
+          </a:p>
+          <a:p>
+            <a:pPr>
+              <a:spcAft>
+                <a:spcPts val="600"/>
+              </a:spcAft>
+            </a:pPr>
+            <a:r>
+              <a:rPr sz="1500">
+                <a:solidFill>
+                  <a:srgbClr val="22282E"/>
+                </a:solidFill>
+              </a:rPr>
+              <a:t>•  Autenticación adaptativa. Añade señales de riesgo (ubicación imposible, dispositivo nuevo,</a:t>
             </a:r>
           </a:p>
         </p:txBody>
@@ -3362,7 +3381,7 @@
                   <a:srgbClr val="0B3D2E"/>
                 </a:solidFill>
               </a:rPr>
-              <a:t>❓ Preguntas frecuentes</a:t>
+              <a:t>✍️ Ejercicios</a:t>
             </a:r>
           </a:p>
         </p:txBody>
@@ -3400,97 +3419,82 @@
                   <a:srgbClr val="22282E"/>
                 </a:solidFill>
               </a:rPr>
-              <a:t>•  ❓ ¿Por qué se dice que FIDO2/passkeys son "resistentes al phishing"?</a:t>
-            </a:r>
-          </a:p>
-          <a:p>
-            <a:pPr>
-              <a:spcAft>
-                <a:spcPts val="600"/>
-              </a:spcAft>
-            </a:pPr>
-            <a:r>
-              <a:rPr sz="1500">
-                <a:solidFill>
-                  <a:srgbClr val="22282E"/>
-                </a:solidFill>
-              </a:rPr>
-              <a:t>•  Porque la credencial criptográfica está ligada al origen (dominio) real. Si el usuario llega a</a:t>
-            </a:r>
-          </a:p>
-          <a:p>
-            <a:pPr>
-              <a:spcAft>
-                <a:spcPts val="600"/>
-              </a:spcAft>
-            </a:pPr>
-            <a:r>
-              <a:rPr sz="1500">
-                <a:solidFill>
-                  <a:srgbClr val="22282E"/>
-                </a:solidFill>
-              </a:rPr>
-              <a:t>•  un sitio falso, la firma no se genera para ese dominio, así que no hay nada que el atacante pueda</a:t>
-            </a:r>
-          </a:p>
-          <a:p>
-            <a:pPr>
-              <a:spcAft>
-                <a:spcPts val="600"/>
-              </a:spcAft>
-            </a:pPr>
-            <a:r>
-              <a:rPr sz="1500">
-                <a:solidFill>
-                  <a:srgbClr val="22282E"/>
-                </a:solidFill>
-              </a:rPr>
-              <a:t>•  reutilizar — a diferencia de un TOTP, que el usuario puede teclear en la web fraudulenta.</a:t>
-            </a:r>
-          </a:p>
-          <a:p>
-            <a:pPr>
-              <a:spcAft>
-                <a:spcPts val="600"/>
-              </a:spcAft>
-            </a:pPr>
-            <a:r>
-              <a:rPr sz="1500">
-                <a:solidFill>
-                  <a:srgbClr val="22282E"/>
-                </a:solidFill>
-              </a:rPr>
-              <a:t>•  ❓ ¿MFA hace innecesarias las buenas contraseñas?</a:t>
-            </a:r>
-          </a:p>
-          <a:p>
-            <a:pPr>
-              <a:spcAft>
-                <a:spcPts val="600"/>
-              </a:spcAft>
-            </a:pPr>
-            <a:r>
-              <a:rPr sz="1500">
-                <a:solidFill>
-                  <a:srgbClr val="22282E"/>
-                </a:solidFill>
-              </a:rPr>
-              <a:t>•  No. MFA es una capa adicional; la contraseña sigue siendo un factor. NIST SP 800-63B recomienda</a:t>
-            </a:r>
-          </a:p>
-          <a:p>
-            <a:pPr>
-              <a:spcAft>
-                <a:spcPts val="600"/>
-              </a:spcAft>
-            </a:pPr>
-            <a:r>
-              <a:rPr sz="1500">
-                <a:solidFill>
-                  <a:srgbClr val="22282E"/>
-                </a:solidFill>
-              </a:rPr>
-              <a:t>•  frases largas, verificar contra listas de contraseñas comprometidas y evitar rotaciones forzadas sin motivo.</a:t>
+              <a:t>•  Clasifica 6 métodos de autenticación por categoría de factor y por resistencia al phishing.</a:t>
+            </a:r>
+          </a:p>
+          <a:p>
+            <a:pPr>
+              <a:spcAft>
+                <a:spcPts val="600"/>
+              </a:spcAft>
+            </a:pPr>
+            <a:r>
+              <a:rPr sz="1500">
+                <a:solidFill>
+                  <a:srgbClr val="22282E"/>
+                </a:solidFill>
+              </a:rPr>
+              <a:t>•  Explica por qué "contraseña + PIN" no es verdadera MFA.</a:t>
+            </a:r>
+          </a:p>
+          <a:p>
+            <a:pPr>
+              <a:spcAft>
+                <a:spcPts val="600"/>
+              </a:spcAft>
+            </a:pPr>
+            <a:r>
+              <a:rPr sz="1500">
+                <a:solidFill>
+                  <a:srgbClr val="22282E"/>
+                </a:solidFill>
+              </a:rPr>
+              <a:t>•  Describe, a alto nivel, cómo WebAuthn impide el phishing que sí afecta a TOTP.</a:t>
+            </a:r>
+          </a:p>
+          <a:p>
+            <a:pPr>
+              <a:spcAft>
+                <a:spcPts val="600"/>
+              </a:spcAft>
+            </a:pPr>
+            <a:r>
+              <a:rPr sz="1500">
+                <a:solidFill>
+                  <a:srgbClr val="22282E"/>
+                </a:solidFill>
+              </a:rPr>
+              <a:t>•  Diseña una política MFA de 3 niveles de riesgo con el factor exigido en cada uno.</a:t>
+            </a:r>
+          </a:p>
+          <a:p>
+            <a:pPr>
+              <a:spcAft>
+                <a:spcPts val="600"/>
+              </a:spcAft>
+            </a:pPr>
+            <a:r>
+              <a:rPr sz="1500">
+                <a:solidFill>
+                  <a:srgbClr val="22282E"/>
+                </a:solidFill>
+              </a:rPr>
+              <a:t>•  Dibuja el flujo completo de checkout de una credencial privilegiada con aprobación y rotación.</a:t>
+            </a:r>
+          </a:p>
+          <a:p>
+            <a:pPr>
+              <a:spcAft>
+                <a:spcPts val="600"/>
+              </a:spcAft>
+            </a:pPr>
+            <a:r>
+              <a:rPr sz="1500">
+                <a:solidFill>
+                  <a:srgbClr val="22282E"/>
+                </a:solidFill>
+              </a:rPr>
+              <a:t>•  Justifica la adopción de zero standing privilege frente a un modelo de admin permanente.</a:t>
             </a:r>
           </a:p>
         </p:txBody>
@@ -3541,7 +3545,7 @@
                   <a:srgbClr val="0B3D2E"/>
                 </a:solidFill>
               </a:rPr>
-              <a:t>🔗 Referencias</a:t>
+              <a:t>📝 Reto verificable</a:t>
             </a:r>
           </a:p>
         </p:txBody>
@@ -3579,6 +3583,528 @@
                   <a:srgbClr val="22282E"/>
                 </a:solidFill>
               </a:rPr>
+              <a:t>•  Entrega un Plan de MFA y PAM para NovaSalud que incluya: la clasificación de factores, la</a:t>
+            </a:r>
+          </a:p>
+          <a:p>
+            <a:pPr>
+              <a:spcAft>
+                <a:spcPts val="600"/>
+              </a:spcAft>
+            </a:pPr>
+            <a:r>
+              <a:rPr sz="1500">
+                <a:solidFill>
+                  <a:srgbClr val="22282E"/>
+                </a:solidFill>
+              </a:rPr>
+              <a:t>•  política MFA por nivel de riesgo con adaptativa, el inventario de cuentas privilegiadas, el flujo</a:t>
+            </a:r>
+          </a:p>
+          <a:p>
+            <a:pPr>
+              <a:spcAft>
+                <a:spcPts val="600"/>
+              </a:spcAft>
+            </a:pPr>
+            <a:r>
+              <a:rPr sz="1500">
+                <a:solidFill>
+                  <a:srgbClr val="22282E"/>
+                </a:solidFill>
+              </a:rPr>
+              <a:t>•  PAM de checkout (aprobación → JIT → bóveda → grabación → rotación) y la política de break-glass.</a:t>
+            </a:r>
+          </a:p>
+          <a:p>
+            <a:pPr>
+              <a:spcAft>
+                <a:spcPts val="600"/>
+              </a:spcAft>
+            </a:pPr>
+            <a:r>
+              <a:rPr sz="1500">
+                <a:solidFill>
+                  <a:srgbClr val="22282E"/>
+                </a:solidFill>
+              </a:rPr>
+              <a:t>•  Criterio de aceptación: dado el escenario "un administrador necesita acceso urgente a la base</a:t>
+            </a:r>
+          </a:p>
+          <a:p>
+            <a:pPr>
+              <a:spcAft>
+                <a:spcPts val="600"/>
+              </a:spcAft>
+            </a:pPr>
+            <a:r>
+              <a:rPr sz="1500">
+                <a:solidFill>
+                  <a:srgbClr val="22282E"/>
+                </a:solidFill>
+              </a:rPr>
+              <a:t>•  de datos clínica a las 3 a. m.", tu plan describe exactamente qué factor MFA se le exige, cómo</a:t>
+            </a:r>
+          </a:p>
+          <a:p>
+            <a:pPr>
+              <a:spcAft>
+                <a:spcPts val="600"/>
+              </a:spcAft>
+            </a:pPr>
+            <a:r>
+              <a:rPr sz="1500">
+                <a:solidFill>
+                  <a:srgbClr val="22282E"/>
+                </a:solidFill>
+              </a:rPr>
+              <a:t>•  obtiene la credencial, por cuánto tiempo, qué queda registrado y cuándo se revoca — sin que ninguna</a:t>
+            </a:r>
+          </a:p>
+          <a:p>
+            <a:pPr>
+              <a:spcAft>
+                <a:spcPts val="600"/>
+              </a:spcAft>
+            </a:pPr>
+            <a:r>
+              <a:rPr sz="1500">
+                <a:solidFill>
+                  <a:srgbClr val="22282E"/>
+                </a:solidFill>
+              </a:rPr>
+              <a:t>•  credencial privilegiada quede activa de forma permanente.</a:t>
+            </a:r>
+          </a:p>
+        </p:txBody>
+      </p:sp>
+    </p:spTree>
+  </p:cSld>
+  <p:clrMapOvr>
+    <a:masterClrMapping/>
+  </p:clrMapOvr>
+</p:sld>
+</file>
+
+<file path=ppt/slides/slide13.xml><?xml version="1.0" encoding="utf-8"?>
+<p:sld xmlns:a="http://schemas.openxmlformats.org/drawingml/2006/main" xmlns:p="http://schemas.openxmlformats.org/presentationml/2006/main" xmlns:r="http://schemas.openxmlformats.org/officeDocument/2006/relationships">
+  <p:cSld>
+    <p:spTree>
+      <p:nvGrpSpPr>
+        <p:cNvPr id="1" name=""/>
+        <p:cNvGrpSpPr/>
+        <p:nvPr/>
+      </p:nvGrpSpPr>
+      <p:grpSpPr/>
+      <p:sp>
+        <p:nvSpPr>
+          <p:cNvPr id="2" name="TextBox 1"/>
+          <p:cNvSpPr txBox="1"/>
+          <p:nvPr/>
+        </p:nvSpPr>
+        <p:spPr>
+          <a:xfrm>
+            <a:off x="457200" y="320040"/>
+            <a:ext cx="8229600" cy="822960"/>
+          </a:xfrm>
+          <a:prstGeom prst="rect">
+            <a:avLst/>
+          </a:prstGeom>
+          <a:noFill/>
+        </p:spPr>
+        <p:txBody>
+          <a:bodyPr wrap="square">
+            <a:spAutoFit/>
+          </a:bodyPr>
+          <a:lstStyle/>
+          <a:p>
+            <a:r>
+              <a:rPr sz="2600" b="1">
+                <a:solidFill>
+                  <a:srgbClr val="0B3D2E"/>
+                </a:solidFill>
+              </a:rPr>
+              <a:t>⚠️ Errores comunes</a:t>
+            </a:r>
+          </a:p>
+        </p:txBody>
+      </p:sp>
+      <p:sp>
+        <p:nvSpPr>
+          <p:cNvPr id="3" name="TextBox 2"/>
+          <p:cNvSpPr txBox="1"/>
+          <p:nvPr/>
+        </p:nvSpPr>
+        <p:spPr>
+          <a:xfrm>
+            <a:off x="457200" y="1280160"/>
+            <a:ext cx="8229600" cy="4937760"/>
+          </a:xfrm>
+          <a:prstGeom prst="rect">
+            <a:avLst/>
+          </a:prstGeom>
+          <a:noFill/>
+        </p:spPr>
+        <p:txBody>
+          <a:bodyPr wrap="square">
+            <a:spAutoFit/>
+          </a:bodyPr>
+          <a:lstStyle/>
+          <a:p>
+            <a:pPr>
+              <a:spcAft>
+                <a:spcPts val="600"/>
+              </a:spcAft>
+            </a:pPr>
+            <a:r>
+              <a:rPr sz="1500">
+                <a:solidFill>
+                  <a:srgbClr val="22282E"/>
+                </a:solidFill>
+              </a:rPr>
+              <a:t>•  MFA por SMS considerado "seguro" — SMS es susceptible a SIM swapping e intercepción (NIST lo desaconseja). Migra a TOTP o FIDO2.</a:t>
+            </a:r>
+          </a:p>
+          <a:p>
+            <a:pPr>
+              <a:spcAft>
+                <a:spcPts val="600"/>
+              </a:spcAft>
+            </a:pPr>
+            <a:r>
+              <a:rPr sz="1500">
+                <a:solidFill>
+                  <a:srgbClr val="22282E"/>
+                </a:solidFill>
+              </a:rPr>
+              <a:t>•  Usuarios aprueban push sin mirar (MFA fatigue) — Bombardeo de notificaciones. Usa number matching o pasa a FIDO2/passkeys.</a:t>
+            </a:r>
+          </a:p>
+          <a:p>
+            <a:pPr>
+              <a:spcAft>
+                <a:spcPts val="600"/>
+              </a:spcAft>
+            </a:pPr>
+            <a:r>
+              <a:rPr sz="1500">
+                <a:solidFill>
+                  <a:srgbClr val="22282E"/>
+                </a:solidFill>
+              </a:rPr>
+              <a:t>•  Admins con privilegio permanente 24/7 — Ventana de exposición enorme. Aplica JIT y zero standing privilege.</a:t>
+            </a:r>
+          </a:p>
+          <a:p>
+            <a:pPr>
+              <a:spcAft>
+                <a:spcPts val="600"/>
+              </a:spcAft>
+            </a:pPr>
+            <a:r>
+              <a:rPr sz="1500">
+                <a:solidFill>
+                  <a:srgbClr val="22282E"/>
+                </a:solidFill>
+              </a:rPr>
+              <a:t>•  Contraseña de root compartida en un gestor de equipo — Sin trazabilidad ni rotación. Usa una bóveda PAM con checkout individual.</a:t>
+            </a:r>
+          </a:p>
+          <a:p>
+            <a:pPr>
+              <a:spcAft>
+                <a:spcPts val="600"/>
+              </a:spcAft>
+            </a:pPr>
+            <a:r>
+              <a:rPr sz="1500">
+                <a:solidFill>
+                  <a:srgbClr val="22282E"/>
+                </a:solidFill>
+              </a:rPr>
+              <a:t>•  Cuenta break-glass usada como acceso rutinario — Se convierte en puerta trasera. Sella, alerta en cada uso y revisa después.</a:t>
+            </a:r>
+          </a:p>
+          <a:p>
+            <a:pPr>
+              <a:spcAft>
+                <a:spcPts val="600"/>
+              </a:spcAft>
+            </a:pPr>
+            <a:r>
+              <a:rPr sz="1500">
+                <a:solidFill>
+                  <a:srgbClr val="22282E"/>
+                </a:solidFill>
+              </a:rPr>
+              <a:t>•  MFA sin cubrir el IdP ni el propio PAM — El eslabón de control queda expuesto. Protege IdP y PAM con el factor más fuerte.</a:t>
+            </a:r>
+          </a:p>
+        </p:txBody>
+      </p:sp>
+    </p:spTree>
+  </p:cSld>
+  <p:clrMapOvr>
+    <a:masterClrMapping/>
+  </p:clrMapOvr>
+</p:sld>
+</file>
+
+<file path=ppt/slides/slide14.xml><?xml version="1.0" encoding="utf-8"?>
+<p:sld xmlns:a="http://schemas.openxmlformats.org/drawingml/2006/main" xmlns:p="http://schemas.openxmlformats.org/presentationml/2006/main" xmlns:r="http://schemas.openxmlformats.org/officeDocument/2006/relationships">
+  <p:cSld>
+    <p:spTree>
+      <p:nvGrpSpPr>
+        <p:cNvPr id="1" name=""/>
+        <p:cNvGrpSpPr/>
+        <p:nvPr/>
+      </p:nvGrpSpPr>
+      <p:grpSpPr/>
+      <p:sp>
+        <p:nvSpPr>
+          <p:cNvPr id="2" name="TextBox 1"/>
+          <p:cNvSpPr txBox="1"/>
+          <p:nvPr/>
+        </p:nvSpPr>
+        <p:spPr>
+          <a:xfrm>
+            <a:off x="457200" y="320040"/>
+            <a:ext cx="8229600" cy="822960"/>
+          </a:xfrm>
+          <a:prstGeom prst="rect">
+            <a:avLst/>
+          </a:prstGeom>
+          <a:noFill/>
+        </p:spPr>
+        <p:txBody>
+          <a:bodyPr wrap="square">
+            <a:spAutoFit/>
+          </a:bodyPr>
+          <a:lstStyle/>
+          <a:p>
+            <a:r>
+              <a:rPr sz="2600" b="1">
+                <a:solidFill>
+                  <a:srgbClr val="0B3D2E"/>
+                </a:solidFill>
+              </a:rPr>
+              <a:t>❓ Preguntas frecuentes</a:t>
+            </a:r>
+          </a:p>
+        </p:txBody>
+      </p:sp>
+      <p:sp>
+        <p:nvSpPr>
+          <p:cNvPr id="3" name="TextBox 2"/>
+          <p:cNvSpPr txBox="1"/>
+          <p:nvPr/>
+        </p:nvSpPr>
+        <p:spPr>
+          <a:xfrm>
+            <a:off x="457200" y="1280160"/>
+            <a:ext cx="8229600" cy="4937760"/>
+          </a:xfrm>
+          <a:prstGeom prst="rect">
+            <a:avLst/>
+          </a:prstGeom>
+          <a:noFill/>
+        </p:spPr>
+        <p:txBody>
+          <a:bodyPr wrap="square">
+            <a:spAutoFit/>
+          </a:bodyPr>
+          <a:lstStyle/>
+          <a:p>
+            <a:pPr>
+              <a:spcAft>
+                <a:spcPts val="600"/>
+              </a:spcAft>
+            </a:pPr>
+            <a:r>
+              <a:rPr sz="1500">
+                <a:solidFill>
+                  <a:srgbClr val="22282E"/>
+                </a:solidFill>
+              </a:rPr>
+              <a:t>•  ❓ ¿Por qué se dice que FIDO2/passkeys son "resistentes al phishing"?</a:t>
+            </a:r>
+          </a:p>
+          <a:p>
+            <a:pPr>
+              <a:spcAft>
+                <a:spcPts val="600"/>
+              </a:spcAft>
+            </a:pPr>
+            <a:r>
+              <a:rPr sz="1500">
+                <a:solidFill>
+                  <a:srgbClr val="22282E"/>
+                </a:solidFill>
+              </a:rPr>
+              <a:t>•  Porque la credencial criptográfica está ligada al origen (dominio) real. Si el usuario llega a</a:t>
+            </a:r>
+          </a:p>
+          <a:p>
+            <a:pPr>
+              <a:spcAft>
+                <a:spcPts val="600"/>
+              </a:spcAft>
+            </a:pPr>
+            <a:r>
+              <a:rPr sz="1500">
+                <a:solidFill>
+                  <a:srgbClr val="22282E"/>
+                </a:solidFill>
+              </a:rPr>
+              <a:t>•  un sitio falso, la firma no se genera para ese dominio, así que no hay nada que el atacante pueda</a:t>
+            </a:r>
+          </a:p>
+          <a:p>
+            <a:pPr>
+              <a:spcAft>
+                <a:spcPts val="600"/>
+              </a:spcAft>
+            </a:pPr>
+            <a:r>
+              <a:rPr sz="1500">
+                <a:solidFill>
+                  <a:srgbClr val="22282E"/>
+                </a:solidFill>
+              </a:rPr>
+              <a:t>•  reutilizar — a diferencia de un TOTP, que el usuario puede teclear en la web fraudulenta.</a:t>
+            </a:r>
+          </a:p>
+          <a:p>
+            <a:pPr>
+              <a:spcAft>
+                <a:spcPts val="600"/>
+              </a:spcAft>
+            </a:pPr>
+            <a:r>
+              <a:rPr sz="1500">
+                <a:solidFill>
+                  <a:srgbClr val="22282E"/>
+                </a:solidFill>
+              </a:rPr>
+              <a:t>•  ❓ ¿MFA hace innecesarias las buenas contraseñas?</a:t>
+            </a:r>
+          </a:p>
+          <a:p>
+            <a:pPr>
+              <a:spcAft>
+                <a:spcPts val="600"/>
+              </a:spcAft>
+            </a:pPr>
+            <a:r>
+              <a:rPr sz="1500">
+                <a:solidFill>
+                  <a:srgbClr val="22282E"/>
+                </a:solidFill>
+              </a:rPr>
+              <a:t>•  No. MFA es una capa adicional; la contraseña sigue siendo un factor. NIST SP 800-63B recomienda</a:t>
+            </a:r>
+          </a:p>
+          <a:p>
+            <a:pPr>
+              <a:spcAft>
+                <a:spcPts val="600"/>
+              </a:spcAft>
+            </a:pPr>
+            <a:r>
+              <a:rPr sz="1500">
+                <a:solidFill>
+                  <a:srgbClr val="22282E"/>
+                </a:solidFill>
+              </a:rPr>
+              <a:t>•  frases largas, verificar contra listas de contraseñas comprometidas y evitar rotaciones forzadas sin motivo.</a:t>
+            </a:r>
+          </a:p>
+        </p:txBody>
+      </p:sp>
+    </p:spTree>
+  </p:cSld>
+  <p:clrMapOvr>
+    <a:masterClrMapping/>
+  </p:clrMapOvr>
+</p:sld>
+</file>
+
+<file path=ppt/slides/slide15.xml><?xml version="1.0" encoding="utf-8"?>
+<p:sld xmlns:a="http://schemas.openxmlformats.org/drawingml/2006/main" xmlns:p="http://schemas.openxmlformats.org/presentationml/2006/main" xmlns:r="http://schemas.openxmlformats.org/officeDocument/2006/relationships">
+  <p:cSld>
+    <p:spTree>
+      <p:nvGrpSpPr>
+        <p:cNvPr id="1" name=""/>
+        <p:cNvGrpSpPr/>
+        <p:nvPr/>
+      </p:nvGrpSpPr>
+      <p:grpSpPr/>
+      <p:sp>
+        <p:nvSpPr>
+          <p:cNvPr id="2" name="TextBox 1"/>
+          <p:cNvSpPr txBox="1"/>
+          <p:nvPr/>
+        </p:nvSpPr>
+        <p:spPr>
+          <a:xfrm>
+            <a:off x="457200" y="320040"/>
+            <a:ext cx="8229600" cy="822960"/>
+          </a:xfrm>
+          <a:prstGeom prst="rect">
+            <a:avLst/>
+          </a:prstGeom>
+          <a:noFill/>
+        </p:spPr>
+        <p:txBody>
+          <a:bodyPr wrap="square">
+            <a:spAutoFit/>
+          </a:bodyPr>
+          <a:lstStyle/>
+          <a:p>
+            <a:r>
+              <a:rPr sz="2600" b="1">
+                <a:solidFill>
+                  <a:srgbClr val="0B3D2E"/>
+                </a:solidFill>
+              </a:rPr>
+              <a:t>🔗 Referencias</a:t>
+            </a:r>
+          </a:p>
+        </p:txBody>
+      </p:sp>
+      <p:sp>
+        <p:nvSpPr>
+          <p:cNvPr id="3" name="TextBox 2"/>
+          <p:cNvSpPr txBox="1"/>
+          <p:nvPr/>
+        </p:nvSpPr>
+        <p:spPr>
+          <a:xfrm>
+            <a:off x="457200" y="1280160"/>
+            <a:ext cx="8229600" cy="4937760"/>
+          </a:xfrm>
+          <a:prstGeom prst="rect">
+            <a:avLst/>
+          </a:prstGeom>
+          <a:noFill/>
+        </p:spPr>
+        <p:txBody>
+          <a:bodyPr wrap="square">
+            <a:spAutoFit/>
+          </a:bodyPr>
+          <a:lstStyle/>
+          <a:p>
+            <a:pPr>
+              <a:spcAft>
+                <a:spcPts val="600"/>
+              </a:spcAft>
+            </a:pPr>
+            <a:r>
+              <a:rPr sz="1500">
+                <a:solidFill>
+                  <a:srgbClr val="22282E"/>
+                </a:solidFill>
+              </a:rPr>
               <a:t>•  NIST SP 800-63B — Digital Identity Guidelines: Authentication and Lifecycle Management. &lt;https://pages.nist.gov/800-63-3/sp800-63b.html&gt;</a:t>
             </a:r>
           </a:p>
@@ -3644,6 +4170,81 @@
           </a:p>
         </p:txBody>
       </p:sp>
+    </p:spTree>
+  </p:cSld>
+  <p:clrMapOvr>
+    <a:masterClrMapping/>
+  </p:clrMapOvr>
+</p:sld>
+</file>
+
+<file path=ppt/slides/slide16.xml><?xml version="1.0" encoding="utf-8"?>
+<p:sld xmlns:a="http://schemas.openxmlformats.org/drawingml/2006/main" xmlns:p="http://schemas.openxmlformats.org/presentationml/2006/main" xmlns:r="http://schemas.openxmlformats.org/officeDocument/2006/relationships">
+  <p:cSld>
+    <p:spTree>
+      <p:nvGrpSpPr>
+        <p:cNvPr id="1" name=""/>
+        <p:cNvGrpSpPr/>
+        <p:nvPr/>
+      </p:nvGrpSpPr>
+      <p:grpSpPr/>
+      <p:sp>
+        <p:nvSpPr>
+          <p:cNvPr id="2" name="TextBox 1"/>
+          <p:cNvSpPr txBox="1"/>
+          <p:nvPr/>
+        </p:nvSpPr>
+        <p:spPr>
+          <a:xfrm>
+            <a:off x="457200" y="274320"/>
+            <a:ext cx="8229600" cy="640080"/>
+          </a:xfrm>
+          <a:prstGeom prst="rect">
+            <a:avLst/>
+          </a:prstGeom>
+          <a:noFill/>
+        </p:spPr>
+        <p:txBody>
+          <a:bodyPr wrap="square">
+            <a:spAutoFit/>
+          </a:bodyPr>
+          <a:lstStyle/>
+          <a:p>
+            <a:r>
+              <a:rPr sz="2200" b="1">
+                <a:solidFill>
+                  <a:srgbClr val="0B3D2E"/>
+                </a:solidFill>
+              </a:rPr>
+              <a:t>Diagrama de la clase</a:t>
+            </a:r>
+          </a:p>
+        </p:txBody>
+      </p:sp>
+      <p:pic>
+        <p:nvPicPr>
+          <p:cNvPr id="3" name="Picture 2" descr="887102e5ccbeed66.png"/>
+          <p:cNvPicPr>
+            <a:picLocks noChangeAspect="1"/>
+          </p:cNvPicPr>
+          <p:nvPr/>
+        </p:nvPicPr>
+        <p:blipFill>
+          <a:blip r:embed="rId2"/>
+          <a:stretch>
+            <a:fillRect/>
+          </a:stretch>
+        </p:blipFill>
+        <p:spPr>
+          <a:xfrm>
+            <a:off x="457200" y="3306588"/>
+            <a:ext cx="8229600" cy="884903"/>
+          </a:xfrm>
+          <a:prstGeom prst="rect">
+            <a:avLst/>
+          </a:prstGeom>
+        </p:spPr>
+      </p:pic>
     </p:spTree>
   </p:cSld>
   <p:clrMapOvr>
@@ -4197,7 +4798,7 @@
                   <a:srgbClr val="0B3D2E"/>
                 </a:solidFill>
               </a:rPr>
-              <a:t>📖 Definiciones y características</a:t>
+              <a:t>🧠 Modelo mental y caso de decisión</a:t>
             </a:r>
           </a:p>
         </p:txBody>
@@ -4235,97 +4836,22 @@
                   <a:srgbClr val="22282E"/>
                 </a:solidFill>
               </a:rPr>
-              <a:t>•  Factor de autenticación: categoría de prueba de identidad — algo que sabes</a:t>
-            </a:r>
-          </a:p>
-          <a:p>
-            <a:pPr>
-              <a:spcAft>
-                <a:spcPts val="600"/>
-              </a:spcAft>
-            </a:pPr>
-            <a:r>
-              <a:rPr sz="1500">
-                <a:solidFill>
-                  <a:srgbClr val="22282E"/>
-                </a:solidFill>
-              </a:rPr>
-              <a:t>•  (contraseña/PIN), algo que tienes (token, teléfono, llave) y algo que eres (biometría).</a:t>
-            </a:r>
-          </a:p>
-          <a:p>
-            <a:pPr>
-              <a:spcAft>
-                <a:spcPts val="600"/>
-              </a:spcAft>
-            </a:pPr>
-            <a:r>
-              <a:rPr sz="1500">
-                <a:solidFill>
-                  <a:srgbClr val="22282E"/>
-                </a:solidFill>
-              </a:rPr>
-              <a:t>•  MFA exige combinar factores de categorías distintas.</a:t>
-            </a:r>
-          </a:p>
-          <a:p>
-            <a:pPr>
-              <a:spcAft>
-                <a:spcPts val="600"/>
-              </a:spcAft>
-            </a:pPr>
-            <a:r>
-              <a:rPr sz="1500">
-                <a:solidFill>
-                  <a:srgbClr val="22282E"/>
-                </a:solidFill>
-              </a:rPr>
-              <a:t>•  MFA: autenticación con dos o más factores independientes. Característica: aunque roben la</a:t>
-            </a:r>
-          </a:p>
-          <a:p>
-            <a:pPr>
-              <a:spcAft>
-                <a:spcPts val="600"/>
-              </a:spcAft>
-            </a:pPr>
-            <a:r>
-              <a:rPr sz="1500">
-                <a:solidFill>
-                  <a:srgbClr val="22282E"/>
-                </a:solidFill>
-              </a:rPr>
-              <a:t>•  contraseña, falta el segundo factor.</a:t>
-            </a:r>
-          </a:p>
-          <a:p>
-            <a:pPr>
-              <a:spcAft>
-                <a:spcPts val="600"/>
-              </a:spcAft>
-            </a:pPr>
-            <a:r>
-              <a:rPr sz="1500">
-                <a:solidFill>
-                  <a:srgbClr val="22282E"/>
-                </a:solidFill>
-              </a:rPr>
-              <a:t>•  TOTP: código de un solo uso basado en tiempo (RFC 6238), generado por app autenticadora.</a:t>
-            </a:r>
-          </a:p>
-          <a:p>
-            <a:pPr>
-              <a:spcAft>
-                <a:spcPts val="600"/>
-              </a:spcAft>
-            </a:pPr>
-            <a:r>
-              <a:rPr sz="1500">
-                <a:solidFill>
-                  <a:srgbClr val="22282E"/>
-                </a:solidFill>
-              </a:rPr>
-              <a:t>•  Mejor que SMS, pero aún phishable (el usuario puede teclearlo en un sitio falso).</a:t>
+              <a:t>•  MFA eleva assurance según protocolo; PAM controla asignación, uso, sesión y retiro del privilegio.</a:t>
+            </a:r>
+          </a:p>
+          <a:p>
+            <a:pPr>
+              <a:spcAft>
+                <a:spcPts val="600"/>
+              </a:spcAft>
+            </a:pPr>
+            <a:r>
+              <a:rPr sz="1500">
+                <a:solidFill>
+                  <a:srgbClr val="22282E"/>
+                </a:solidFill>
+              </a:rPr>
+              <a:t>•  Caso razonado. Un OTP es retransmitido por phishing. La migración prioriza autenticación ligada al verificador.</a:t>
             </a:r>
           </a:p>
         </p:txBody>
@@ -4376,7 +4902,7 @@
                   <a:srgbClr val="0B3D2E"/>
                 </a:solidFill>
               </a:rPr>
-              <a:t>🧰 Herramientas y preparación</a:t>
+              <a:t>📔 Glosario operativo complementario</a:t>
             </a:r>
           </a:p>
         </p:txBody>
@@ -4414,97 +4940,52 @@
                   <a:srgbClr val="22282E"/>
                 </a:solidFill>
               </a:rPr>
-              <a:t>•  Una app autenticadora TOTP (Google Authenticator, Aegis, etc.) y, si tienes, una llave</a:t>
-            </a:r>
-          </a:p>
-          <a:p>
-            <a:pPr>
-              <a:spcAft>
-                <a:spcPts val="600"/>
-              </a:spcAft>
-            </a:pPr>
-            <a:r>
-              <a:rPr sz="1500">
-                <a:solidFill>
-                  <a:srgbClr val="22282E"/>
-                </a:solidFill>
-              </a:rPr>
-              <a:t>•  FIDO2 (YubiKey, o passkey del sistema operativo/navegador) para probar WebAuthn en sitios de</a:t>
-            </a:r>
-          </a:p>
-          <a:p>
-            <a:pPr>
-              <a:spcAft>
-                <a:spcPts val="600"/>
-              </a:spcAft>
-            </a:pPr>
-            <a:r>
-              <a:rPr sz="1500">
-                <a:solidFill>
-                  <a:srgbClr val="22282E"/>
-                </a:solidFill>
-              </a:rPr>
-              <a:t>•  demostración propios (p. ej. el demo oficial de WebAuthn).</a:t>
-            </a:r>
-          </a:p>
-          <a:p>
-            <a:pPr>
-              <a:spcAft>
-                <a:spcPts val="600"/>
-              </a:spcAft>
-            </a:pPr>
-            <a:r>
-              <a:rPr sz="1500">
-                <a:solidFill>
-                  <a:srgbClr val="22282E"/>
-                </a:solidFill>
-              </a:rPr>
-              <a:t>•  Keycloak u otro IdP de laboratorio para configurar políticas MFA por flujo de autenticación.</a:t>
-            </a:r>
-          </a:p>
-          <a:p>
-            <a:pPr>
-              <a:spcAft>
-                <a:spcPts val="600"/>
-              </a:spcAft>
-            </a:pPr>
-            <a:r>
-              <a:rPr sz="1500">
-                <a:solidFill>
-                  <a:srgbClr val="22282E"/>
-                </a:solidFill>
-              </a:rPr>
-              <a:t>•  Documento de referencia NIST SP 800-63B (AAL, requisitos de autenticadores).</a:t>
-            </a:r>
-          </a:p>
-          <a:p>
-            <a:pPr>
-              <a:spcAft>
-                <a:spcPts val="600"/>
-              </a:spcAft>
-            </a:pPr>
-            <a:r>
-              <a:rPr sz="1500">
-                <a:solidFill>
-                  <a:srgbClr val="22282E"/>
-                </a:solidFill>
-              </a:rPr>
-              <a:t>•  Para PAM: material conceptual de una solución (CyberArk, Delinea, HashiCorp Vault, Microsoft</a:t>
-            </a:r>
-          </a:p>
-          <a:p>
-            <a:pPr>
-              <a:spcAft>
-                <a:spcPts val="600"/>
-              </a:spcAft>
-            </a:pPr>
-            <a:r>
-              <a:rPr sz="1500">
-                <a:solidFill>
-                  <a:srgbClr val="22282E"/>
-                </a:solidFill>
-              </a:rPr>
-              <a:t>•  Entra PIM). Para el ejercicio basta el diseño del flujo; no necesitas desplegar la herramienta.</a:t>
+              <a:t>•  Término — Definición</a:t>
+            </a:r>
+          </a:p>
+          <a:p>
+            <a:pPr>
+              <a:spcAft>
+                <a:spcPts val="600"/>
+              </a:spcAft>
+            </a:pPr>
+            <a:r>
+              <a:rPr sz="1500">
+                <a:solidFill>
+                  <a:srgbClr val="22282E"/>
+                </a:solidFill>
+              </a:rPr>
+              <a:t>•  Evidencia — Información cuya procedencia y relación con un criterio pueden revisarse.</a:t>
+            </a:r>
+          </a:p>
+          <a:p>
+            <a:pPr>
+              <a:spcAft>
+                <a:spcPts val="600"/>
+              </a:spcAft>
+            </a:pPr>
+            <a:r>
+              <a:rPr sz="1500">
+                <a:solidFill>
+                  <a:srgbClr val="22282E"/>
+                </a:solidFill>
+              </a:rPr>
+              <a:t>•  Supuesto — Condición declarada de la que depende una conclusión.</a:t>
+            </a:r>
+          </a:p>
+          <a:p>
+            <a:pPr>
+              <a:spcAft>
+                <a:spcPts val="600"/>
+              </a:spcAft>
+            </a:pPr>
+            <a:r>
+              <a:rPr sz="1500">
+                <a:solidFill>
+                  <a:srgbClr val="22282E"/>
+                </a:solidFill>
+              </a:rPr>
+              <a:t>•  Riesgo residual — Exposición que permanece después del tratamiento.</a:t>
             </a:r>
           </a:p>
         </p:txBody>
@@ -4555,7 +5036,7 @@
                   <a:srgbClr val="0B3D2E"/>
                 </a:solidFill>
               </a:rPr>
-              <a:t>🧪 Laboratorio guiado — Política MFA y flujo de acceso privilegiado</a:t>
+              <a:t>✅ Criterio de dominio</a:t>
             </a:r>
           </a:p>
         </p:txBody>
@@ -4593,97 +5074,7 @@
                   <a:srgbClr val="22282E"/>
                 </a:solidFill>
               </a:rPr>
-              <a:t>•  Sobre "NovaSalud", integrando lo visto en las clases 313 y 314.</a:t>
-            </a:r>
-          </a:p>
-          <a:p>
-            <a:pPr>
-              <a:spcAft>
-                <a:spcPts val="600"/>
-              </a:spcAft>
-            </a:pPr>
-            <a:r>
-              <a:rPr sz="1500">
-                <a:solidFill>
-                  <a:srgbClr val="22282E"/>
-                </a:solidFill>
-              </a:rPr>
-              <a:t>•  Inventario de factores. Lista los métodos disponibles (contraseña, SMS-OTP, TOTP, push,</a:t>
-            </a:r>
-          </a:p>
-          <a:p>
-            <a:pPr>
-              <a:spcAft>
-                <a:spcPts val="600"/>
-              </a:spcAft>
-            </a:pPr>
-            <a:r>
-              <a:rPr sz="1500">
-                <a:solidFill>
-                  <a:srgbClr val="22282E"/>
-                </a:solidFill>
-              </a:rPr>
-              <a:t>•  FIDO2/passkey, biometría) y clasifícalos por categoría y por resistencia al phishing.</a:t>
-            </a:r>
-          </a:p>
-          <a:p>
-            <a:pPr>
-              <a:spcAft>
-                <a:spcPts val="600"/>
-              </a:spcAft>
-            </a:pPr>
-            <a:r>
-              <a:rPr sz="1500">
-                <a:solidFill>
-                  <a:srgbClr val="22282E"/>
-                </a:solidFill>
-              </a:rPr>
-              <a:t>•  Política MFA por riesgo. Define reglas: (a) acceso normal a apps internas → contraseña +</a:t>
-            </a:r>
-          </a:p>
-          <a:p>
-            <a:pPr>
-              <a:spcAft>
-                <a:spcPts val="600"/>
-              </a:spcAft>
-            </a:pPr>
-            <a:r>
-              <a:rPr sz="1500">
-                <a:solidFill>
-                  <a:srgbClr val="22282E"/>
-                </a:solidFill>
-              </a:rPr>
-              <a:t>•  TOTP/push; (b) acceso a datos Restringido o desde red no confiable → exige FIDO2/passkey;</a:t>
-            </a:r>
-          </a:p>
-          <a:p>
-            <a:pPr>
-              <a:spcAft>
-                <a:spcPts val="600"/>
-              </a:spcAft>
-            </a:pPr>
-            <a:r>
-              <a:rPr sz="1500">
-                <a:solidFill>
-                  <a:srgbClr val="22282E"/>
-                </a:solidFill>
-              </a:rPr>
-              <a:t>•  (c) administradores → siempre AAL3 (FIDO2 de hardware). Justifica cada nivel.</a:t>
-            </a:r>
-          </a:p>
-          <a:p>
-            <a:pPr>
-              <a:spcAft>
-                <a:spcPts val="600"/>
-              </a:spcAft>
-            </a:pPr>
-            <a:r>
-              <a:rPr sz="1500">
-                <a:solidFill>
-                  <a:srgbClr val="22282E"/>
-                </a:solidFill>
-              </a:rPr>
-              <a:t>•  Autenticación adaptativa. Añade señales de riesgo (ubicación imposible, dispositivo nuevo,</a:t>
+              <a:t>•  El alumno demuestra dominio cuando explica el diagrama, resuelve el caso con evidencia, declara límites y puede defender por qué su decisión cambia si cambia un supuesto.</a:t>
             </a:r>
           </a:p>
         </p:txBody>
@@ -4734,7 +5125,7 @@
                   <a:srgbClr val="0B3D2E"/>
                 </a:solidFill>
               </a:rPr>
-              <a:t>✍️ Ejercicios</a:t>
+              <a:t>📖 Definiciones y características</a:t>
             </a:r>
           </a:p>
         </p:txBody>
@@ -4772,82 +5163,97 @@
                   <a:srgbClr val="22282E"/>
                 </a:solidFill>
               </a:rPr>
-              <a:t>•  Clasifica 6 métodos de autenticación por categoría de factor y por resistencia al phishing.</a:t>
-            </a:r>
-          </a:p>
-          <a:p>
-            <a:pPr>
-              <a:spcAft>
-                <a:spcPts val="600"/>
-              </a:spcAft>
-            </a:pPr>
-            <a:r>
-              <a:rPr sz="1500">
-                <a:solidFill>
-                  <a:srgbClr val="22282E"/>
-                </a:solidFill>
-              </a:rPr>
-              <a:t>•  Explica por qué "contraseña + PIN" no es verdadera MFA.</a:t>
-            </a:r>
-          </a:p>
-          <a:p>
-            <a:pPr>
-              <a:spcAft>
-                <a:spcPts val="600"/>
-              </a:spcAft>
-            </a:pPr>
-            <a:r>
-              <a:rPr sz="1500">
-                <a:solidFill>
-                  <a:srgbClr val="22282E"/>
-                </a:solidFill>
-              </a:rPr>
-              <a:t>•  Describe, a alto nivel, cómo WebAuthn impide el phishing que sí afecta a TOTP.</a:t>
-            </a:r>
-          </a:p>
-          <a:p>
-            <a:pPr>
-              <a:spcAft>
-                <a:spcPts val="600"/>
-              </a:spcAft>
-            </a:pPr>
-            <a:r>
-              <a:rPr sz="1500">
-                <a:solidFill>
-                  <a:srgbClr val="22282E"/>
-                </a:solidFill>
-              </a:rPr>
-              <a:t>•  Diseña una política MFA de 3 niveles de riesgo con el factor exigido en cada uno.</a:t>
-            </a:r>
-          </a:p>
-          <a:p>
-            <a:pPr>
-              <a:spcAft>
-                <a:spcPts val="600"/>
-              </a:spcAft>
-            </a:pPr>
-            <a:r>
-              <a:rPr sz="1500">
-                <a:solidFill>
-                  <a:srgbClr val="22282E"/>
-                </a:solidFill>
-              </a:rPr>
-              <a:t>•  Dibuja el flujo completo de checkout de una credencial privilegiada con aprobación y rotación.</a:t>
-            </a:r>
-          </a:p>
-          <a:p>
-            <a:pPr>
-              <a:spcAft>
-                <a:spcPts val="600"/>
-              </a:spcAft>
-            </a:pPr>
-            <a:r>
-              <a:rPr sz="1500">
-                <a:solidFill>
-                  <a:srgbClr val="22282E"/>
-                </a:solidFill>
-              </a:rPr>
-              <a:t>•  Justifica la adopción de zero standing privilege frente a un modelo de admin permanente.</a:t>
+              <a:t>•  Factor de autenticación: categoría de prueba de identidad — algo que sabes</a:t>
+            </a:r>
+          </a:p>
+          <a:p>
+            <a:pPr>
+              <a:spcAft>
+                <a:spcPts val="600"/>
+              </a:spcAft>
+            </a:pPr>
+            <a:r>
+              <a:rPr sz="1500">
+                <a:solidFill>
+                  <a:srgbClr val="22282E"/>
+                </a:solidFill>
+              </a:rPr>
+              <a:t>•  (contraseña/PIN), algo que tienes (token, teléfono, llave) y algo que eres (biometría).</a:t>
+            </a:r>
+          </a:p>
+          <a:p>
+            <a:pPr>
+              <a:spcAft>
+                <a:spcPts val="600"/>
+              </a:spcAft>
+            </a:pPr>
+            <a:r>
+              <a:rPr sz="1500">
+                <a:solidFill>
+                  <a:srgbClr val="22282E"/>
+                </a:solidFill>
+              </a:rPr>
+              <a:t>•  MFA exige combinar factores de categorías distintas.</a:t>
+            </a:r>
+          </a:p>
+          <a:p>
+            <a:pPr>
+              <a:spcAft>
+                <a:spcPts val="600"/>
+              </a:spcAft>
+            </a:pPr>
+            <a:r>
+              <a:rPr sz="1500">
+                <a:solidFill>
+                  <a:srgbClr val="22282E"/>
+                </a:solidFill>
+              </a:rPr>
+              <a:t>•  MFA: autenticación con dos o más factores independientes. Característica: aunque roben la</a:t>
+            </a:r>
+          </a:p>
+          <a:p>
+            <a:pPr>
+              <a:spcAft>
+                <a:spcPts val="600"/>
+              </a:spcAft>
+            </a:pPr>
+            <a:r>
+              <a:rPr sz="1500">
+                <a:solidFill>
+                  <a:srgbClr val="22282E"/>
+                </a:solidFill>
+              </a:rPr>
+              <a:t>•  contraseña, falta el segundo factor.</a:t>
+            </a:r>
+          </a:p>
+          <a:p>
+            <a:pPr>
+              <a:spcAft>
+                <a:spcPts val="600"/>
+              </a:spcAft>
+            </a:pPr>
+            <a:r>
+              <a:rPr sz="1500">
+                <a:solidFill>
+                  <a:srgbClr val="22282E"/>
+                </a:solidFill>
+              </a:rPr>
+              <a:t>•  TOTP: código de un solo uso basado en tiempo (RFC 6238), generado por app autenticadora.</a:t>
+            </a:r>
+          </a:p>
+          <a:p>
+            <a:pPr>
+              <a:spcAft>
+                <a:spcPts val="600"/>
+              </a:spcAft>
+            </a:pPr>
+            <a:r>
+              <a:rPr sz="1500">
+                <a:solidFill>
+                  <a:srgbClr val="22282E"/>
+                </a:solidFill>
+              </a:rPr>
+              <a:t>•  Mejor que SMS, pero aún phishable (el usuario puede teclearlo en un sitio falso).</a:t>
             </a:r>
           </a:p>
         </p:txBody>
@@ -4898,7 +5304,7 @@
                   <a:srgbClr val="0B3D2E"/>
                 </a:solidFill>
               </a:rPr>
-              <a:t>📝 Reto verificable</a:t>
+              <a:t>🧰 Herramientas y preparación</a:t>
             </a:r>
           </a:p>
         </p:txBody>
@@ -4936,97 +5342,97 @@
                   <a:srgbClr val="22282E"/>
                 </a:solidFill>
               </a:rPr>
-              <a:t>•  Entrega un Plan de MFA y PAM para NovaSalud que incluya: la clasificación de factores, la</a:t>
-            </a:r>
-          </a:p>
-          <a:p>
-            <a:pPr>
-              <a:spcAft>
-                <a:spcPts val="600"/>
-              </a:spcAft>
-            </a:pPr>
-            <a:r>
-              <a:rPr sz="1500">
-                <a:solidFill>
-                  <a:srgbClr val="22282E"/>
-                </a:solidFill>
-              </a:rPr>
-              <a:t>•  política MFA por nivel de riesgo con adaptativa, el inventario de cuentas privilegiadas, el flujo</a:t>
-            </a:r>
-          </a:p>
-          <a:p>
-            <a:pPr>
-              <a:spcAft>
-                <a:spcPts val="600"/>
-              </a:spcAft>
-            </a:pPr>
-            <a:r>
-              <a:rPr sz="1500">
-                <a:solidFill>
-                  <a:srgbClr val="22282E"/>
-                </a:solidFill>
-              </a:rPr>
-              <a:t>•  PAM de checkout (aprobación → JIT → bóveda → grabación → rotación) y la política de break-glass.</a:t>
-            </a:r>
-          </a:p>
-          <a:p>
-            <a:pPr>
-              <a:spcAft>
-                <a:spcPts val="600"/>
-              </a:spcAft>
-            </a:pPr>
-            <a:r>
-              <a:rPr sz="1500">
-                <a:solidFill>
-                  <a:srgbClr val="22282E"/>
-                </a:solidFill>
-              </a:rPr>
-              <a:t>•  Criterio de aceptación: dado el escenario "un administrador necesita acceso urgente a la base</a:t>
-            </a:r>
-          </a:p>
-          <a:p>
-            <a:pPr>
-              <a:spcAft>
-                <a:spcPts val="600"/>
-              </a:spcAft>
-            </a:pPr>
-            <a:r>
-              <a:rPr sz="1500">
-                <a:solidFill>
-                  <a:srgbClr val="22282E"/>
-                </a:solidFill>
-              </a:rPr>
-              <a:t>•  de datos clínica a las 3 a. m.", tu plan describe exactamente qué factor MFA se le exige, cómo</a:t>
-            </a:r>
-          </a:p>
-          <a:p>
-            <a:pPr>
-              <a:spcAft>
-                <a:spcPts val="600"/>
-              </a:spcAft>
-            </a:pPr>
-            <a:r>
-              <a:rPr sz="1500">
-                <a:solidFill>
-                  <a:srgbClr val="22282E"/>
-                </a:solidFill>
-              </a:rPr>
-              <a:t>•  obtiene la credencial, por cuánto tiempo, qué queda registrado y cuándo se revoca — sin que ninguna</a:t>
-            </a:r>
-          </a:p>
-          <a:p>
-            <a:pPr>
-              <a:spcAft>
-                <a:spcPts val="600"/>
-              </a:spcAft>
-            </a:pPr>
-            <a:r>
-              <a:rPr sz="1500">
-                <a:solidFill>
-                  <a:srgbClr val="22282E"/>
-                </a:solidFill>
-              </a:rPr>
-              <a:t>•  credencial privilegiada quede activa de forma permanente.</a:t>
+              <a:t>•  Una app autenticadora TOTP (Google Authenticator, Aegis, etc.) y, si tienes, una llave</a:t>
+            </a:r>
+          </a:p>
+          <a:p>
+            <a:pPr>
+              <a:spcAft>
+                <a:spcPts val="600"/>
+              </a:spcAft>
+            </a:pPr>
+            <a:r>
+              <a:rPr sz="1500">
+                <a:solidFill>
+                  <a:srgbClr val="22282E"/>
+                </a:solidFill>
+              </a:rPr>
+              <a:t>•  FIDO2 (YubiKey, o passkey del sistema operativo/navegador) para probar WebAuthn en sitios de</a:t>
+            </a:r>
+          </a:p>
+          <a:p>
+            <a:pPr>
+              <a:spcAft>
+                <a:spcPts val="600"/>
+              </a:spcAft>
+            </a:pPr>
+            <a:r>
+              <a:rPr sz="1500">
+                <a:solidFill>
+                  <a:srgbClr val="22282E"/>
+                </a:solidFill>
+              </a:rPr>
+              <a:t>•  demostración propios (p. ej. el demo oficial de WebAuthn).</a:t>
+            </a:r>
+          </a:p>
+          <a:p>
+            <a:pPr>
+              <a:spcAft>
+                <a:spcPts val="600"/>
+              </a:spcAft>
+            </a:pPr>
+            <a:r>
+              <a:rPr sz="1500">
+                <a:solidFill>
+                  <a:srgbClr val="22282E"/>
+                </a:solidFill>
+              </a:rPr>
+              <a:t>•  Keycloak u otro IdP de laboratorio para configurar políticas MFA por flujo de autenticación.</a:t>
+            </a:r>
+          </a:p>
+          <a:p>
+            <a:pPr>
+              <a:spcAft>
+                <a:spcPts val="600"/>
+              </a:spcAft>
+            </a:pPr>
+            <a:r>
+              <a:rPr sz="1500">
+                <a:solidFill>
+                  <a:srgbClr val="22282E"/>
+                </a:solidFill>
+              </a:rPr>
+              <a:t>•  Documento de referencia NIST SP 800-63B (AAL, requisitos de autenticadores).</a:t>
+            </a:r>
+          </a:p>
+          <a:p>
+            <a:pPr>
+              <a:spcAft>
+                <a:spcPts val="600"/>
+              </a:spcAft>
+            </a:pPr>
+            <a:r>
+              <a:rPr sz="1500">
+                <a:solidFill>
+                  <a:srgbClr val="22282E"/>
+                </a:solidFill>
+              </a:rPr>
+              <a:t>•  Para PAM: material conceptual de una solución (CyberArk, Delinea, HashiCorp Vault, Microsoft</a:t>
+            </a:r>
+          </a:p>
+          <a:p>
+            <a:pPr>
+              <a:spcAft>
+                <a:spcPts val="600"/>
+              </a:spcAft>
+            </a:pPr>
+            <a:r>
+              <a:rPr sz="1500">
+                <a:solidFill>
+                  <a:srgbClr val="22282E"/>
+                </a:solidFill>
+              </a:rPr>
+              <a:t>•  Entra PIM). Para el ejercicio basta el diseño del flujo; no necesitas desplegar la herramienta.</a:t>
             </a:r>
           </a:p>
         </p:txBody>
